--- a/嵌入式学习资料/STM32/大三下课堂课件/第五章 GPIO原理及应用.pptx
+++ b/嵌入式学习资料/STM32/大三下课堂课件/第五章 GPIO原理及应用.pptx
@@ -268,7 +268,7 @@
             <a:fld id="{6887AC20-8C1D-44D7-B35A-E6F76E68648C}" type="datetimeFigureOut">
               <a:rPr lang="zh-CN" altLang="en-US" smtClean="0"/>
               <a:pPr/>
-              <a:t>2026/5/27</a:t>
+              <a:t>2026/6/14</a:t>
             </a:fld>
             <a:endParaRPr lang="zh-CN" altLang="en-US"/>
           </a:p>
@@ -574,7 +574,7 @@
             <a:fld id="{82F288E0-7875-42C4-84C8-98DBBD3BF4D2}" type="datetimeFigureOut">
               <a:rPr lang="zh-CN" altLang="en-US" smtClean="0"/>
               <a:pPr/>
-              <a:t>2026/5/27</a:t>
+              <a:t>2026/6/14</a:t>
             </a:fld>
             <a:endParaRPr lang="zh-CN" altLang="en-US"/>
           </a:p>
@@ -710,7 +710,7 @@
             <a:fld id="{82F288E0-7875-42C4-84C8-98DBBD3BF4D2}" type="datetimeFigureOut">
               <a:rPr lang="zh-CN" altLang="en-US" smtClean="0"/>
               <a:pPr/>
-              <a:t>2026/5/27</a:t>
+              <a:t>2026/6/14</a:t>
             </a:fld>
             <a:endParaRPr lang="zh-CN" altLang="en-US"/>
           </a:p>
@@ -959,7 +959,7 @@
             <a:fld id="{82F288E0-7875-42C4-84C8-98DBBD3BF4D2}" type="datetimeFigureOut">
               <a:rPr lang="zh-CN" altLang="en-US" smtClean="0"/>
               <a:pPr/>
-              <a:t>2026/5/27</a:t>
+              <a:t>2026/6/14</a:t>
             </a:fld>
             <a:endParaRPr lang="zh-CN" altLang="en-US"/>
           </a:p>
@@ -1134,7 +1134,7 @@
             <a:fld id="{82F288E0-7875-42C4-84C8-98DBBD3BF4D2}" type="datetimeFigureOut">
               <a:rPr lang="zh-CN" altLang="en-US" smtClean="0"/>
               <a:pPr/>
-              <a:t>2026/5/27</a:t>
+              <a:t>2026/6/14</a:t>
             </a:fld>
             <a:endParaRPr lang="zh-CN" altLang="en-US"/>
           </a:p>
@@ -1282,7 +1282,7 @@
             <a:fld id="{82F288E0-7875-42C4-84C8-98DBBD3BF4D2}" type="datetimeFigureOut">
               <a:rPr lang="zh-CN" altLang="en-US" smtClean="0"/>
               <a:pPr/>
-              <a:t>2026/5/27</a:t>
+              <a:t>2026/6/14</a:t>
             </a:fld>
             <a:endParaRPr lang="zh-CN" altLang="en-US"/>
           </a:p>
@@ -1382,7 +1382,7 @@
             <a:fld id="{0E6A473D-8055-43E1-A01D-B0413067B7D8}" type="datetimeFigureOut">
               <a:rPr lang="zh-CN" altLang="en-US" smtClean="0"/>
               <a:pPr/>
-              <a:t>2026/5/27</a:t>
+              <a:t>2026/6/14</a:t>
             </a:fld>
             <a:endParaRPr lang="zh-CN" altLang="en-US"/>
           </a:p>
@@ -3208,7 +3208,7 @@
             <a:fld id="{DB75B134-9E54-4233-9AD4-A661A84126CB}" type="datetimeFigureOut">
               <a:rPr lang="zh-CN" altLang="en-US" smtClean="0"/>
               <a:pPr/>
-              <a:t>2026/5/27</a:t>
+              <a:t>2026/6/14</a:t>
             </a:fld>
             <a:endParaRPr lang="zh-CN" altLang="en-US"/>
           </a:p>
@@ -3308,7 +3308,7 @@
             <a:fld id="{82F288E0-7875-42C4-84C8-98DBBD3BF4D2}" type="datetimeFigureOut">
               <a:rPr lang="zh-CN" altLang="en-US" smtClean="0"/>
               <a:pPr/>
-              <a:t>2026/5/27</a:t>
+              <a:t>2026/6/14</a:t>
             </a:fld>
             <a:endParaRPr lang="zh-CN" altLang="en-US"/>
           </a:p>
@@ -3648,7 +3648,7 @@
             <a:fld id="{82F288E0-7875-42C4-84C8-98DBBD3BF4D2}" type="datetimeFigureOut">
               <a:rPr lang="zh-CN" altLang="en-US" smtClean="0"/>
               <a:pPr/>
-              <a:t>2026/5/27</a:t>
+              <a:t>2026/6/14</a:t>
             </a:fld>
             <a:endParaRPr lang="zh-CN" altLang="en-US"/>
           </a:p>
@@ -3835,7 +3835,7 @@
             <a:fld id="{82F288E0-7875-42C4-84C8-98DBBD3BF4D2}" type="datetimeFigureOut">
               <a:rPr lang="zh-CN" altLang="en-US" smtClean="0"/>
               <a:pPr/>
-              <a:t>2026/5/27</a:t>
+              <a:t>2026/6/14</a:t>
             </a:fld>
             <a:endParaRPr lang="zh-CN" altLang="en-US"/>
           </a:p>
@@ -4000,7 +4000,7 @@
             <a:fld id="{82F288E0-7875-42C4-84C8-98DBBD3BF4D2}" type="datetimeFigureOut">
               <a:rPr lang="zh-CN" altLang="en-US" smtClean="0"/>
               <a:pPr/>
-              <a:t>2026/5/27</a:t>
+              <a:t>2026/6/14</a:t>
             </a:fld>
             <a:endParaRPr lang="zh-CN" altLang="en-US"/>
           </a:p>
@@ -4242,7 +4242,7 @@
             <a:fld id="{82F288E0-7875-42C4-84C8-98DBBD3BF4D2}" type="datetimeFigureOut">
               <a:rPr lang="zh-CN" altLang="en-US" smtClean="0"/>
               <a:pPr/>
-              <a:t>2026/5/27</a:t>
+              <a:t>2026/6/14</a:t>
             </a:fld>
             <a:endParaRPr lang="zh-CN" altLang="en-US"/>
           </a:p>
@@ -4468,7 +4468,7 @@
             <a:fld id="{82F288E0-7875-42C4-84C8-98DBBD3BF4D2}" type="datetimeFigureOut">
               <a:rPr lang="zh-CN" altLang="en-US" smtClean="0"/>
               <a:pPr/>
-              <a:t>2026/5/27</a:t>
+              <a:t>2026/6/14</a:t>
             </a:fld>
             <a:endParaRPr lang="zh-CN" altLang="en-US"/>
           </a:p>
@@ -4829,7 +4829,7 @@
             <a:fld id="{82F288E0-7875-42C4-84C8-98DBBD3BF4D2}" type="datetimeFigureOut">
               <a:rPr lang="zh-CN" altLang="en-US" smtClean="0"/>
               <a:pPr/>
-              <a:t>2026/5/27</a:t>
+              <a:t>2026/6/14</a:t>
             </a:fld>
             <a:endParaRPr lang="zh-CN" altLang="en-US"/>
           </a:p>
@@ -4943,7 +4943,7 @@
             <a:fld id="{82F288E0-7875-42C4-84C8-98DBBD3BF4D2}" type="datetimeFigureOut">
               <a:rPr lang="zh-CN" altLang="en-US" smtClean="0"/>
               <a:pPr/>
-              <a:t>2026/5/27</a:t>
+              <a:t>2026/6/14</a:t>
             </a:fld>
             <a:endParaRPr lang="zh-CN" altLang="en-US"/>
           </a:p>
@@ -5151,7 +5151,7 @@
             <a:fld id="{82F288E0-7875-42C4-84C8-98DBBD3BF4D2}" type="datetimeFigureOut">
               <a:rPr lang="zh-CN" altLang="en-US" smtClean="0"/>
               <a:pPr/>
-              <a:t>2026/5/27</a:t>
+              <a:t>2026/6/14</a:t>
             </a:fld>
             <a:endParaRPr lang="zh-CN" altLang="en-US"/>
           </a:p>
@@ -5690,7 +5690,7 @@
             <a:fld id="{0E6A473D-8055-43E1-A01D-B0413067B7D8}" type="datetimeFigureOut">
               <a:rPr lang="zh-CN" altLang="en-US" smtClean="0"/>
               <a:pPr/>
-              <a:t>2026/5/27</a:t>
+              <a:t>2026/6/14</a:t>
             </a:fld>
             <a:endParaRPr lang="zh-CN" altLang="en-US"/>
           </a:p>
